--- a/dist/초3/국어/발표와쓰기/초3_국어_발표와쓰기_02_문단쓰기.pptx
+++ b/dist/초3/국어/발표와쓰기/초3_국어_발표와쓰기_02_문단쓰기.pptx
@@ -119,39 +119,39 @@
   <p:extLst>
     <p:ext uri="{521415D9-36F7-43E2-AB2F-B90AF26B5E84}">
       <p14:sectionLst xmlns:p14="http://schemas.microsoft.com/office/powerpoint/2010/main">
-        <p14:section name="도입" id="{6830bebc-debc-4ead-7806-064fad08cfbe}">
+        <p14:section name="도입" id="{b70e8836-0e95-d118-7fb0-4db1557e9b1a}">
           <p14:sldIdLst>
             <p14:sldId id="256"/>
             <p14:sldId id="257"/>
           </p14:sldIdLst>
         </p14:section>
-        <p14:section name="개념" id="{c6b3f119-683c-0ef2-60bb-280373c31b93}">
+        <p14:section name="개념" id="{1e7e7ab2-a747-b28d-b855-a105b1ad2226}">
           <p14:sldIdLst>
             <p14:sldId id="258"/>
             <p14:sldId id="259"/>
             <p14:sldId id="260"/>
           </p14:sldIdLst>
         </p14:section>
-        <p14:section name="연습" id="{4277987f-463c-5218-57fe-23fabf81cf83}">
+        <p14:section name="연습" id="{24209a81-0c00-6143-8f71-289a41b00128}">
           <p14:sldIdLst>
             <p14:sldId id="261"/>
             <p14:sldId id="262"/>
             <p14:sldId id="263"/>
           </p14:sldIdLst>
         </p14:section>
-        <p14:section name="확인" id="{24131846-8c5c-22cd-667d-1a6664d52f5e}">
+        <p14:section name="확인" id="{4be310ef-6a3a-b506-4b37-c611d83b299c}">
           <p14:sldIdLst>
             <p14:sldId id="264"/>
             <p14:sldId id="265"/>
             <p14:sldId id="266"/>
           </p14:sldIdLst>
         </p14:section>
-        <p14:section name="정리" id="{f4a31b16-2c24-5181-b387-4dce2bd3b1a5}">
+        <p14:section name="정리" id="{ee9f46ae-3dba-1f46-0df0-012eb6fbce89}">
           <p14:sldIdLst>
             <p14:sldId id="267"/>
           </p14:sldIdLst>
         </p14:section>
-        <p14:section name="보충" id="{58c50128-0acd-01be-b21c-ff629d000e05}">
+        <p14:section name="보충" id="{3fc989f6-b30f-1f71-1471-3f3f2cf658eb}">
           <p14:sldIdLst>
             <p14:sldId id="268"/>
           </p14:sldIdLst>
@@ -2856,7 +2856,7 @@
           <a:bodyPr wrap="square" lIns="0" tIns="0" rIns="0" bIns="0" rtlCol="0" anchor="ctr"/>
           <a:lstStyle/>
           <a:p>
-            <a:pPr algn="l" indent="0" marL="0">
+            <a:pPr eaLnBrk="0" algn="l" indent="0" marL="0">
               <a:buNone/>
             </a:pPr>
             <a:r>
@@ -2897,7 +2897,7 @@
           <a:bodyPr wrap="square" lIns="0" tIns="0" rIns="0" bIns="0" rtlCol="0" anchor="t"/>
           <a:lstStyle/>
           <a:p>
-            <a:pPr indent="0" marL="0">
+            <a:pPr eaLnBrk="0" indent="0" marL="0">
               <a:buNone/>
             </a:pPr>
             <a:r>
@@ -2914,7 +2914,7 @@
             <a:endParaRPr lang="ko-KR" sz="3000" dirty="0"/>
           </a:p>
           <a:p>
-            <a:pPr indent="0" marL="0">
+            <a:pPr eaLnBrk="0" indent="0" marL="0">
               <a:buNone/>
             </a:pPr>
             <a:r>
@@ -2980,7 +2980,7 @@
           <a:bodyPr wrap="square" lIns="0" tIns="0" rIns="0" bIns="0" rtlCol="0" anchor="ctr"/>
           <a:lstStyle/>
           <a:p>
-            <a:pPr indent="0" marL="0">
+            <a:pPr eaLnBrk="0" indent="0" marL="0">
               <a:spcAft>
                 <a:spcPts val="600"/>
               </a:spcAft>
@@ -3000,7 +3000,7 @@
             <a:endParaRPr lang="ko-KR" sz="3000" dirty="0"/>
           </a:p>
           <a:p>
-            <a:pPr indent="0" marL="0">
+            <a:pPr eaLnBrk="0" indent="0" marL="0">
               <a:spcAft>
                 <a:spcPts val="600"/>
               </a:spcAft>
@@ -3020,7 +3020,7 @@
             <a:endParaRPr lang="ko-KR" sz="3000" dirty="0"/>
           </a:p>
           <a:p>
-            <a:pPr indent="0" marL="0">
+            <a:pPr eaLnBrk="0" indent="0" marL="0">
               <a:spcAft>
                 <a:spcPts val="600"/>
               </a:spcAft>
@@ -3089,7 +3089,7 @@
           <a:bodyPr wrap="square" lIns="0" tIns="0" rIns="0" bIns="0" rtlCol="0" anchor="ctr"/>
           <a:lstStyle/>
           <a:p>
-            <a:pPr algn="l" indent="0" marL="0">
+            <a:pPr eaLnBrk="0" algn="l" indent="0" marL="0">
               <a:buNone/>
             </a:pPr>
             <a:r>
@@ -3155,7 +3155,7 @@
           <a:bodyPr wrap="square" lIns="0" tIns="0" rIns="0" bIns="0" rtlCol="0" anchor="ctr"/>
           <a:lstStyle/>
           <a:p>
-            <a:pPr indent="0" marL="0">
+            <a:pPr eaLnBrk="0" indent="0" marL="0">
               <a:spcAft>
                 <a:spcPts val="600"/>
               </a:spcAft>
@@ -3205,7 +3205,7 @@
           <a:bodyPr wrap="square" lIns="177800" tIns="0" rIns="177800" bIns="0" rtlCol="0" anchor="ctr"/>
           <a:lstStyle/>
           <a:p>
-            <a:pPr algn="l" indent="0" marL="0">
+            <a:pPr eaLnBrk="0" algn="l" indent="0" marL="0">
               <a:buNone/>
             </a:pPr>
             <a:r>
@@ -3244,7 +3244,7 @@
           <a:bodyPr wrap="square" lIns="0" tIns="0" rIns="0" bIns="0" rtlCol="0" anchor="ctr"/>
           <a:lstStyle/>
           <a:p>
-            <a:pPr algn="l" indent="0" marL="0">
+            <a:pPr eaLnBrk="0" algn="l" indent="0" marL="0">
               <a:buNone/>
             </a:pPr>
             <a:r>
@@ -3291,7 +3291,7 @@
           <a:bodyPr wrap="square" lIns="177800" tIns="0" rIns="177800" bIns="0" rtlCol="0" anchor="ctr"/>
           <a:lstStyle/>
           <a:p>
-            <a:pPr algn="l" indent="0" marL="0">
+            <a:pPr eaLnBrk="0" algn="l" indent="0" marL="0">
               <a:buNone/>
             </a:pPr>
             <a:r>
@@ -3330,7 +3330,7 @@
           <a:bodyPr wrap="square" lIns="0" tIns="0" rIns="0" bIns="0" rtlCol="0" anchor="ctr"/>
           <a:lstStyle/>
           <a:p>
-            <a:pPr algn="l" indent="0" marL="0">
+            <a:pPr eaLnBrk="0" algn="l" indent="0" marL="0">
               <a:buNone/>
             </a:pPr>
             <a:r>
@@ -3369,7 +3369,7 @@
           <a:bodyPr wrap="square" lIns="0" tIns="0" rIns="0" bIns="0" rtlCol="0" anchor="ctr"/>
           <a:lstStyle/>
           <a:p>
-            <a:pPr algn="l" indent="0" marL="0">
+            <a:pPr eaLnBrk="0" algn="l" indent="0" marL="0">
               <a:buNone/>
             </a:pPr>
             <a:r>
@@ -3408,7 +3408,7 @@
           <a:bodyPr wrap="square" lIns="0" tIns="0" rIns="0" bIns="0" rtlCol="0" anchor="ctr"/>
           <a:lstStyle/>
           <a:p>
-            <a:pPr algn="l" indent="0" marL="0">
+            <a:pPr eaLnBrk="0" algn="l" indent="0" marL="0">
               <a:buNone/>
             </a:pPr>
             <a:r>
@@ -3465,7 +3465,7 @@
             </a:lvl1pPr>
           </a:lstStyle>
           <a:p>
-            <a:pPr algn="r"/>
+            <a:pPr eaLnBrk="0" algn="r"/>
             <a:fld id="{F7021451-1387-4CA6-816F-3879F97B5CBC}" type="slidenum">
               <a:rPr b="0" lang="en-US"/>
               <a:t>10</a:t>
@@ -3522,7 +3522,7 @@
           <a:bodyPr wrap="square" lIns="0" tIns="0" rIns="0" bIns="0" rtlCol="0" anchor="ctr"/>
           <a:lstStyle/>
           <a:p>
-            <a:pPr algn="l" indent="0" marL="0">
+            <a:pPr eaLnBrk="0" algn="l" indent="0" marL="0">
               <a:buNone/>
             </a:pPr>
             <a:r>
@@ -3561,7 +3561,7 @@
           <a:bodyPr wrap="square" lIns="0" tIns="0" rIns="0" bIns="0" rtlCol="0" anchor="ctr"/>
           <a:lstStyle/>
           <a:p>
-            <a:pPr algn="l" indent="0" marL="0">
+            <a:pPr eaLnBrk="0" algn="l" indent="0" marL="0">
               <a:buNone/>
             </a:pPr>
             <a:r>
@@ -3627,7 +3627,7 @@
           <a:bodyPr wrap="square" lIns="0" tIns="0" rIns="0" bIns="0" rtlCol="0" anchor="ctr"/>
           <a:lstStyle/>
           <a:p>
-            <a:pPr indent="0" marL="0">
+            <a:pPr eaLnBrk="0" indent="0" marL="0">
               <a:spcAft>
                 <a:spcPts val="600"/>
               </a:spcAft>
@@ -3677,7 +3677,7 @@
           <a:bodyPr wrap="square" lIns="0" tIns="0" rIns="0" bIns="0" rtlCol="0" anchor="ctr"/>
           <a:lstStyle/>
           <a:p>
-            <a:pPr algn="ctr" indent="0" marL="0">
+            <a:pPr eaLnBrk="0" algn="ctr" indent="0" marL="0">
               <a:buNone/>
             </a:pPr>
             <a:r>
@@ -3743,7 +3743,7 @@
           <a:bodyPr wrap="square" lIns="0" tIns="0" rIns="0" bIns="0" rtlCol="0" anchor="ctr"/>
           <a:lstStyle/>
           <a:p>
-            <a:pPr indent="0" marL="0">
+            <a:pPr eaLnBrk="0" indent="0" marL="0">
               <a:spcAft>
                 <a:spcPts val="600"/>
               </a:spcAft>
@@ -3763,7 +3763,7 @@
             <a:endParaRPr lang="ko-KR" sz="3000" dirty="0"/>
           </a:p>
           <a:p>
-            <a:pPr indent="0" marL="0">
+            <a:pPr eaLnBrk="0" indent="0" marL="0">
               <a:spcAft>
                 <a:spcPts val="600"/>
               </a:spcAft>
@@ -3813,7 +3813,7 @@
           <a:bodyPr wrap="square" lIns="0" tIns="0" rIns="0" bIns="0" rtlCol="0" anchor="ctr"/>
           <a:lstStyle/>
           <a:p>
-            <a:pPr algn="ctr" indent="0" marL="0">
+            <a:pPr eaLnBrk="0" algn="ctr" indent="0" marL="0">
               <a:buNone/>
             </a:pPr>
             <a:r>
@@ -3879,7 +3879,7 @@
           <a:bodyPr wrap="square" lIns="0" tIns="0" rIns="0" bIns="0" rtlCol="0" anchor="ctr"/>
           <a:lstStyle/>
           <a:p>
-            <a:pPr indent="0" marL="0">
+            <a:pPr eaLnBrk="0" indent="0" marL="0">
               <a:spcAft>
                 <a:spcPts val="600"/>
               </a:spcAft>
@@ -3899,7 +3899,7 @@
             <a:endParaRPr lang="ko-KR" sz="3000" dirty="0"/>
           </a:p>
           <a:p>
-            <a:pPr indent="0" marL="0">
+            <a:pPr eaLnBrk="0" indent="0" marL="0">
               <a:spcAft>
                 <a:spcPts val="600"/>
               </a:spcAft>
@@ -3949,7 +3949,7 @@
           <a:bodyPr wrap="square" lIns="0" tIns="0" rIns="0" bIns="0" rtlCol="0" anchor="ctr"/>
           <a:lstStyle/>
           <a:p>
-            <a:pPr algn="ctr" indent="0" marL="0">
+            <a:pPr eaLnBrk="0" algn="ctr" indent="0" marL="0">
               <a:buNone/>
             </a:pPr>
             <a:r>
@@ -4015,7 +4015,7 @@
           <a:bodyPr wrap="square" lIns="0" tIns="0" rIns="0" bIns="0" rtlCol="0" anchor="ctr"/>
           <a:lstStyle/>
           <a:p>
-            <a:pPr indent="0" marL="0">
+            <a:pPr eaLnBrk="0" indent="0" marL="0">
               <a:spcAft>
                 <a:spcPts val="600"/>
               </a:spcAft>
@@ -4035,7 +4035,7 @@
             <a:endParaRPr lang="ko-KR" sz="3000" dirty="0"/>
           </a:p>
           <a:p>
-            <a:pPr indent="0" marL="0">
+            <a:pPr eaLnBrk="0" indent="0" marL="0">
               <a:spcAft>
                 <a:spcPts val="600"/>
               </a:spcAft>
@@ -4095,7 +4095,7 @@
             </a:lvl1pPr>
           </a:lstStyle>
           <a:p>
-            <a:pPr algn="r"/>
+            <a:pPr eaLnBrk="0" algn="r"/>
             <a:fld id="{F7021451-1387-4CA6-816F-3879F97B5CBC}" type="slidenum">
               <a:rPr b="0" lang="en-US"/>
               <a:t>11</a:t>
@@ -4152,7 +4152,7 @@
           <a:bodyPr wrap="square" lIns="0" tIns="0" rIns="0" bIns="0" rtlCol="0" anchor="ctr"/>
           <a:lstStyle/>
           <a:p>
-            <a:pPr algn="l" indent="0" marL="0">
+            <a:pPr eaLnBrk="0" algn="l" indent="0" marL="0">
               <a:buNone/>
             </a:pPr>
             <a:r>
@@ -4218,7 +4218,7 @@
           <a:bodyPr wrap="square" lIns="0" tIns="0" rIns="0" bIns="0" rtlCol="0" anchor="ctr"/>
           <a:lstStyle/>
           <a:p>
-            <a:pPr indent="0" marL="0">
+            <a:pPr eaLnBrk="0" indent="0" marL="0">
               <a:spcAft>
                 <a:spcPts val="600"/>
               </a:spcAft>
@@ -4238,7 +4238,7 @@
             <a:endParaRPr lang="ko-KR" sz="3000" dirty="0"/>
           </a:p>
           <a:p>
-            <a:pPr indent="0" marL="0">
+            <a:pPr eaLnBrk="0" indent="0" marL="0">
               <a:spcAft>
                 <a:spcPts val="600"/>
               </a:spcAft>
@@ -4288,7 +4288,7 @@
           <a:bodyPr wrap="square" lIns="177800" tIns="0" rIns="177800" bIns="0" rtlCol="0" anchor="ctr"/>
           <a:lstStyle/>
           <a:p>
-            <a:pPr algn="l" indent="0" marL="0">
+            <a:pPr eaLnBrk="0" algn="l" indent="0" marL="0">
               <a:buNone/>
             </a:pPr>
             <a:r>
@@ -4335,7 +4335,7 @@
           <a:bodyPr wrap="square" lIns="177800" tIns="0" rIns="177800" bIns="0" rtlCol="0" anchor="ctr"/>
           <a:lstStyle/>
           <a:p>
-            <a:pPr algn="l" indent="0" marL="0">
+            <a:pPr eaLnBrk="0" algn="l" indent="0" marL="0">
               <a:buNone/>
             </a:pPr>
             <a:r>
@@ -4374,7 +4374,7 @@
           <a:bodyPr wrap="square" lIns="0" tIns="0" rIns="0" bIns="0" rtlCol="0" anchor="t"/>
           <a:lstStyle/>
           <a:p>
-            <a:pPr algn="l" indent="0" marL="0">
+            <a:pPr eaLnBrk="0" algn="l" indent="0" marL="0">
               <a:buNone/>
             </a:pPr>
             <a:r>
@@ -4413,7 +4413,7 @@
           <a:bodyPr wrap="square" lIns="0" tIns="0" rIns="0" bIns="0" rtlCol="0" anchor="ctr"/>
           <a:lstStyle/>
           <a:p>
-            <a:pPr algn="l" indent="0" marL="0">
+            <a:pPr eaLnBrk="0" algn="l" indent="0" marL="0">
               <a:buNone/>
             </a:pPr>
             <a:r>
@@ -4452,7 +4452,7 @@
           <a:bodyPr wrap="square" lIns="0" tIns="0" rIns="0" bIns="0" rtlCol="0" anchor="ctr"/>
           <a:lstStyle/>
           <a:p>
-            <a:pPr algn="l" indent="0" marL="0">
+            <a:pPr eaLnBrk="0" algn="l" indent="0" marL="0">
               <a:buNone/>
             </a:pPr>
             <a:r>
@@ -4491,7 +4491,7 @@
           <a:bodyPr wrap="square" lIns="0" tIns="0" rIns="0" bIns="0" rtlCol="0" anchor="ctr"/>
           <a:lstStyle/>
           <a:p>
-            <a:pPr algn="l" indent="0" marL="0">
+            <a:pPr eaLnBrk="0" algn="l" indent="0" marL="0">
               <a:buNone/>
             </a:pPr>
             <a:r>
@@ -4530,7 +4530,7 @@
           <a:bodyPr wrap="square" lIns="0" tIns="0" rIns="0" bIns="0" rtlCol="0" anchor="ctr"/>
           <a:lstStyle/>
           <a:p>
-            <a:pPr algn="l" indent="0" marL="0">
+            <a:pPr eaLnBrk="0" algn="l" indent="0" marL="0">
               <a:buNone/>
             </a:pPr>
             <a:r>
@@ -4587,7 +4587,7 @@
             </a:lvl1pPr>
           </a:lstStyle>
           <a:p>
-            <a:pPr algn="r"/>
+            <a:pPr eaLnBrk="0" algn="r"/>
             <a:fld id="{F7021451-1387-4CA6-816F-3879F97B5CBC}" type="slidenum">
               <a:rPr b="0" lang="en-US"/>
               <a:t>12</a:t>
@@ -4644,7 +4644,7 @@
           <a:bodyPr wrap="square" lIns="0" tIns="0" rIns="0" bIns="0" rtlCol="0" anchor="ctr"/>
           <a:lstStyle/>
           <a:p>
-            <a:pPr algn="l" indent="0" marL="0">
+            <a:pPr eaLnBrk="0" algn="l" indent="0" marL="0">
               <a:buNone/>
             </a:pPr>
             <a:r>
@@ -4683,7 +4683,7 @@
           <a:bodyPr wrap="square" lIns="0" tIns="0" rIns="0" bIns="0" rtlCol="0" anchor="ctr"/>
           <a:lstStyle/>
           <a:p>
-            <a:pPr algn="l" indent="0" marL="0">
+            <a:pPr eaLnBrk="0" algn="l" indent="0" marL="0">
               <a:buNone/>
             </a:pPr>
             <a:r>
@@ -4749,7 +4749,7 @@
           <a:bodyPr wrap="square" lIns="0" tIns="0" rIns="0" bIns="0" rtlCol="0" anchor="ctr"/>
           <a:lstStyle/>
           <a:p>
-            <a:pPr indent="0" marL="0">
+            <a:pPr eaLnBrk="0" indent="0" marL="0">
               <a:spcAft>
                 <a:spcPts val="600"/>
               </a:spcAft>
@@ -4818,7 +4818,7 @@
           <a:bodyPr wrap="square" lIns="0" tIns="0" rIns="0" bIns="0" rtlCol="0" anchor="ctr"/>
           <a:lstStyle/>
           <a:p>
-            <a:pPr indent="0" marL="0">
+            <a:pPr eaLnBrk="0" indent="0" marL="0">
               <a:spcAft>
                 <a:spcPts val="600"/>
               </a:spcAft>
@@ -4838,7 +4838,7 @@
             <a:endParaRPr lang="ko-KR" sz="3000" dirty="0"/>
           </a:p>
           <a:p>
-            <a:pPr indent="0" marL="0">
+            <a:pPr eaLnBrk="0" indent="0" marL="0">
               <a:spcAft>
                 <a:spcPts val="600"/>
               </a:spcAft>
@@ -4907,7 +4907,7 @@
           <a:bodyPr wrap="square" lIns="0" tIns="0" rIns="0" bIns="0" rtlCol="0" anchor="ctr"/>
           <a:lstStyle/>
           <a:p>
-            <a:pPr indent="0" marL="0">
+            <a:pPr eaLnBrk="0" indent="0" marL="0">
               <a:spcAft>
                 <a:spcPts val="600"/>
               </a:spcAft>
@@ -4927,7 +4927,7 @@
             <a:endParaRPr lang="ko-KR" sz="3000" dirty="0"/>
           </a:p>
           <a:p>
-            <a:pPr indent="0" marL="0">
+            <a:pPr eaLnBrk="0" indent="0" marL="0">
               <a:spcAft>
                 <a:spcPts val="600"/>
               </a:spcAft>
@@ -4996,7 +4996,7 @@
           <a:bodyPr wrap="square" lIns="0" tIns="0" rIns="0" bIns="0" rtlCol="0" anchor="ctr"/>
           <a:lstStyle/>
           <a:p>
-            <a:pPr indent="0" marL="0">
+            <a:pPr eaLnBrk="0" indent="0" marL="0">
               <a:spcAft>
                 <a:spcPts val="600"/>
               </a:spcAft>
@@ -5016,7 +5016,7 @@
             <a:endParaRPr lang="ko-KR" sz="3000" dirty="0"/>
           </a:p>
           <a:p>
-            <a:pPr indent="0" marL="0">
+            <a:pPr eaLnBrk="0" indent="0" marL="0">
               <a:spcAft>
                 <a:spcPts val="600"/>
               </a:spcAft>
@@ -5076,7 +5076,7 @@
             </a:lvl1pPr>
           </a:lstStyle>
           <a:p>
-            <a:pPr algn="r"/>
+            <a:pPr eaLnBrk="0" algn="r"/>
             <a:fld id="{F7021451-1387-4CA6-816F-3879F97B5CBC}" type="slidenum">
               <a:rPr b="0" lang="en-US"/>
               <a:t>13</a:t>
@@ -5133,7 +5133,7 @@
           <a:bodyPr wrap="square" lIns="0" tIns="0" rIns="0" bIns="0" rtlCol="0" anchor="ctr"/>
           <a:lstStyle/>
           <a:p>
-            <a:pPr algn="l" indent="0" marL="0">
+            <a:pPr eaLnBrk="0" algn="l" indent="0" marL="0">
               <a:buNone/>
             </a:pPr>
             <a:r>
@@ -5199,7 +5199,7 @@
           <a:bodyPr wrap="square" lIns="0" tIns="0" rIns="0" bIns="0" rtlCol="0" anchor="ctr"/>
           <a:lstStyle/>
           <a:p>
-            <a:pPr indent="0" marL="0">
+            <a:pPr eaLnBrk="0" indent="0" marL="0">
               <a:spcAft>
                 <a:spcPts val="600"/>
               </a:spcAft>
@@ -5268,7 +5268,7 @@
           <a:bodyPr wrap="square" lIns="0" tIns="0" rIns="0" bIns="0" rtlCol="0" anchor="t"/>
           <a:lstStyle/>
           <a:p>
-            <a:pPr indent="0" marL="0">
+            <a:pPr eaLnBrk="0" algn="l" indent="0" marL="0">
               <a:lnSpc>
                 <a:spcPct val="105000"/>
               </a:lnSpc>
@@ -5331,7 +5331,7 @@
             </a:lvl1pPr>
           </a:lstStyle>
           <a:p>
-            <a:pPr algn="r"/>
+            <a:pPr eaLnBrk="0" algn="r"/>
             <a:fld id="{F7021451-1387-4CA6-816F-3879F97B5CBC}" type="slidenum">
               <a:rPr b="0" lang="en-US"/>
               <a:t>2</a:t>
@@ -5388,7 +5388,7 @@
           <a:bodyPr wrap="square" lIns="0" tIns="0" rIns="0" bIns="0" rtlCol="0" anchor="ctr"/>
           <a:lstStyle/>
           <a:p>
-            <a:pPr algn="l" indent="0" marL="0">
+            <a:pPr eaLnBrk="0" algn="l" indent="0" marL="0">
               <a:buNone/>
             </a:pPr>
             <a:r>
@@ -5454,7 +5454,7 @@
           <a:bodyPr wrap="square" lIns="0" tIns="0" rIns="0" bIns="0" rtlCol="0" anchor="ctr"/>
           <a:lstStyle/>
           <a:p>
-            <a:pPr indent="0" marL="0">
+            <a:pPr eaLnBrk="0" indent="0" marL="0">
               <a:spcAft>
                 <a:spcPts val="600"/>
               </a:spcAft>
@@ -5523,7 +5523,7 @@
           <a:bodyPr wrap="square" lIns="0" tIns="0" rIns="0" bIns="0" rtlCol="0" anchor="ctr"/>
           <a:lstStyle/>
           <a:p>
-            <a:pPr indent="0" marL="0">
+            <a:pPr eaLnBrk="0" indent="0" marL="0">
               <a:spcAft>
                 <a:spcPts val="600"/>
               </a:spcAft>
@@ -5543,7 +5543,7 @@
             <a:endParaRPr lang="ko-KR" sz="3000" dirty="0"/>
           </a:p>
           <a:p>
-            <a:pPr indent="0" marL="0">
+            <a:pPr eaLnBrk="0" indent="0" marL="0">
               <a:spcAft>
                 <a:spcPts val="600"/>
               </a:spcAft>
@@ -5612,7 +5612,7 @@
           <a:bodyPr wrap="square" lIns="0" tIns="0" rIns="0" bIns="0" rtlCol="0" anchor="ctr"/>
           <a:lstStyle/>
           <a:p>
-            <a:pPr indent="0" marL="0">
+            <a:pPr eaLnBrk="0" indent="0" marL="0">
               <a:spcAft>
                 <a:spcPts val="600"/>
               </a:spcAft>
@@ -5632,7 +5632,7 @@
             <a:endParaRPr lang="ko-KR" sz="3000" dirty="0"/>
           </a:p>
           <a:p>
-            <a:pPr indent="0" marL="0">
+            <a:pPr eaLnBrk="0" indent="0" marL="0">
               <a:spcAft>
                 <a:spcPts val="600"/>
               </a:spcAft>
@@ -5652,7 +5652,7 @@
             <a:endParaRPr lang="ko-KR" sz="3000" dirty="0"/>
           </a:p>
           <a:p>
-            <a:pPr indent="0" marL="0">
+            <a:pPr eaLnBrk="0" indent="0" marL="0">
               <a:spcAft>
                 <a:spcPts val="600"/>
               </a:spcAft>
@@ -5721,7 +5721,7 @@
           <a:bodyPr wrap="square" lIns="0" tIns="0" rIns="0" bIns="0" rtlCol="0" anchor="ctr"/>
           <a:lstStyle/>
           <a:p>
-            <a:pPr indent="0" marL="0">
+            <a:pPr eaLnBrk="0" indent="0" marL="0">
               <a:spcAft>
                 <a:spcPts val="600"/>
               </a:spcAft>
@@ -5741,7 +5741,7 @@
             <a:endParaRPr lang="ko-KR" sz="3000" dirty="0"/>
           </a:p>
           <a:p>
-            <a:pPr indent="0" marL="0">
+            <a:pPr eaLnBrk="0" indent="0" marL="0">
               <a:spcAft>
                 <a:spcPts val="600"/>
               </a:spcAft>
@@ -5801,7 +5801,7 @@
             </a:lvl1pPr>
           </a:lstStyle>
           <a:p>
-            <a:pPr algn="r"/>
+            <a:pPr eaLnBrk="0" algn="r"/>
             <a:fld id="{F7021451-1387-4CA6-816F-3879F97B5CBC}" type="slidenum">
               <a:rPr b="0" lang="en-US"/>
               <a:t>3</a:t>
@@ -5858,7 +5858,7 @@
           <a:bodyPr wrap="square" lIns="0" tIns="0" rIns="0" bIns="0" rtlCol="0" anchor="ctr"/>
           <a:lstStyle/>
           <a:p>
-            <a:pPr algn="l" indent="0" marL="0">
+            <a:pPr eaLnBrk="0" algn="l" indent="0" marL="0">
               <a:buNone/>
             </a:pPr>
             <a:r>
@@ -5903,7 +5903,7 @@
           <a:bodyPr wrap="square" lIns="0" tIns="0" rIns="0" bIns="0" rtlCol="0" anchor="ctr"/>
           <a:lstStyle/>
           <a:p>
-            <a:pPr algn="ctr" indent="0" marL="0">
+            <a:pPr eaLnBrk="0" algn="ctr" indent="0" marL="0">
               <a:buNone/>
             </a:pPr>
             <a:r>
@@ -5942,7 +5942,7 @@
           <a:bodyPr wrap="square" lIns="0" tIns="0" rIns="0" bIns="0" rtlCol="0" anchor="t"/>
           <a:lstStyle/>
           <a:p>
-            <a:pPr algn="l" indent="0" marL="0">
+            <a:pPr eaLnBrk="0" algn="l" indent="0" marL="0">
               <a:buNone/>
             </a:pPr>
             <a:r>
@@ -5987,7 +5987,7 @@
           <a:bodyPr wrap="square" lIns="0" tIns="0" rIns="0" bIns="0" rtlCol="0" anchor="ctr"/>
           <a:lstStyle/>
           <a:p>
-            <a:pPr algn="ctr" indent="0" marL="0">
+            <a:pPr eaLnBrk="0" algn="ctr" indent="0" marL="0">
               <a:buNone/>
             </a:pPr>
             <a:r>
@@ -6026,7 +6026,7 @@
           <a:bodyPr wrap="square" lIns="0" tIns="0" rIns="0" bIns="0" rtlCol="0" anchor="t"/>
           <a:lstStyle/>
           <a:p>
-            <a:pPr algn="l" indent="0" marL="0">
+            <a:pPr eaLnBrk="0" algn="l" indent="0" marL="0">
               <a:buNone/>
             </a:pPr>
             <a:r>
@@ -6071,7 +6071,7 @@
           <a:bodyPr wrap="square" lIns="0" tIns="0" rIns="0" bIns="0" rtlCol="0" anchor="ctr"/>
           <a:lstStyle/>
           <a:p>
-            <a:pPr algn="ctr" indent="0" marL="0">
+            <a:pPr eaLnBrk="0" algn="ctr" indent="0" marL="0">
               <a:buNone/>
             </a:pPr>
             <a:r>
@@ -6110,7 +6110,7 @@
           <a:bodyPr wrap="square" lIns="0" tIns="0" rIns="0" bIns="0" rtlCol="0" anchor="t"/>
           <a:lstStyle/>
           <a:p>
-            <a:pPr algn="l" indent="0" marL="0">
+            <a:pPr eaLnBrk="0" algn="l" indent="0" marL="0">
               <a:buNone/>
             </a:pPr>
             <a:r>
@@ -6155,7 +6155,7 @@
           <a:bodyPr wrap="square" lIns="0" tIns="0" rIns="0" bIns="0" rtlCol="0" anchor="ctr"/>
           <a:lstStyle/>
           <a:p>
-            <a:pPr algn="ctr" indent="0" marL="0">
+            <a:pPr eaLnBrk="0" algn="ctr" indent="0" marL="0">
               <a:buNone/>
             </a:pPr>
             <a:r>
@@ -6194,7 +6194,7 @@
           <a:bodyPr wrap="square" lIns="0" tIns="0" rIns="0" bIns="0" rtlCol="0" anchor="t"/>
           <a:lstStyle/>
           <a:p>
-            <a:pPr algn="l" indent="0" marL="0">
+            <a:pPr eaLnBrk="0" algn="l" indent="0" marL="0">
               <a:buNone/>
             </a:pPr>
             <a:r>
@@ -6239,7 +6239,7 @@
           <a:bodyPr wrap="square" lIns="0" tIns="0" rIns="0" bIns="0" rtlCol="0" anchor="ctr"/>
           <a:lstStyle/>
           <a:p>
-            <a:pPr algn="ctr" indent="0" marL="0">
+            <a:pPr eaLnBrk="0" algn="ctr" indent="0" marL="0">
               <a:buNone/>
             </a:pPr>
             <a:r>
@@ -6278,7 +6278,7 @@
           <a:bodyPr wrap="square" lIns="0" tIns="0" rIns="0" bIns="0" rtlCol="0" anchor="t"/>
           <a:lstStyle/>
           <a:p>
-            <a:pPr algn="l" indent="0" marL="0">
+            <a:pPr eaLnBrk="0" algn="l" indent="0" marL="0">
               <a:buNone/>
             </a:pPr>
             <a:r>
@@ -6335,7 +6335,7 @@
             </a:lvl1pPr>
           </a:lstStyle>
           <a:p>
-            <a:pPr algn="r"/>
+            <a:pPr eaLnBrk="0" algn="r"/>
             <a:fld id="{F7021451-1387-4CA6-816F-3879F97B5CBC}" type="slidenum">
               <a:rPr b="0" lang="en-US"/>
               <a:t>4</a:t>
@@ -6392,7 +6392,7 @@
           <a:bodyPr wrap="square" lIns="0" tIns="0" rIns="0" bIns="0" rtlCol="0" anchor="ctr"/>
           <a:lstStyle/>
           <a:p>
-            <a:pPr algn="l" indent="0" marL="0">
+            <a:pPr eaLnBrk="0" algn="l" indent="0" marL="0">
               <a:buNone/>
             </a:pPr>
             <a:r>
@@ -6458,7 +6458,7 @@
           <a:bodyPr wrap="square" lIns="0" tIns="0" rIns="0" bIns="0" rtlCol="0" anchor="ctr"/>
           <a:lstStyle/>
           <a:p>
-            <a:pPr indent="0" marL="0">
+            <a:pPr eaLnBrk="0" indent="0" marL="0">
               <a:spcAft>
                 <a:spcPts val="600"/>
               </a:spcAft>
@@ -6527,7 +6527,7 @@
           <a:bodyPr wrap="square" lIns="0" tIns="0" rIns="0" bIns="0" rtlCol="0" anchor="t"/>
           <a:lstStyle/>
           <a:p>
-            <a:pPr indent="0" marL="0">
+            <a:pPr eaLnBrk="0" algn="l" indent="0" marL="0">
               <a:lnSpc>
                 <a:spcPct val="105000"/>
               </a:lnSpc>
@@ -6590,7 +6590,7 @@
             </a:lvl1pPr>
           </a:lstStyle>
           <a:p>
-            <a:pPr algn="r"/>
+            <a:pPr eaLnBrk="0" algn="r"/>
             <a:fld id="{F7021451-1387-4CA6-816F-3879F97B5CBC}" type="slidenum">
               <a:rPr b="0" lang="en-US"/>
               <a:t>5</a:t>
@@ -6647,7 +6647,7 @@
           <a:bodyPr wrap="square" lIns="0" tIns="0" rIns="0" bIns="0" rtlCol="0" anchor="ctr"/>
           <a:lstStyle/>
           <a:p>
-            <a:pPr algn="l" indent="0" marL="0">
+            <a:pPr eaLnBrk="0" algn="l" indent="0" marL="0">
               <a:buNone/>
             </a:pPr>
             <a:r>
@@ -6713,7 +6713,7 @@
           <a:bodyPr wrap="square" lIns="0" tIns="0" rIns="0" bIns="0" rtlCol="0" anchor="ctr"/>
           <a:lstStyle/>
           <a:p>
-            <a:pPr indent="0" marL="0">
+            <a:pPr eaLnBrk="0" indent="0" marL="0">
               <a:spcAft>
                 <a:spcPts val="600"/>
               </a:spcAft>
@@ -6782,7 +6782,7 @@
           <a:bodyPr wrap="square" lIns="0" tIns="0" rIns="0" bIns="0" rtlCol="0" anchor="t"/>
           <a:lstStyle/>
           <a:p>
-            <a:pPr indent="0" marL="0">
+            <a:pPr eaLnBrk="0" algn="l" indent="0" marL="0">
               <a:lnSpc>
                 <a:spcPct val="105000"/>
               </a:lnSpc>
@@ -6845,7 +6845,7 @@
             </a:lvl1pPr>
           </a:lstStyle>
           <a:p>
-            <a:pPr algn="r"/>
+            <a:pPr eaLnBrk="0" algn="r"/>
             <a:fld id="{F7021451-1387-4CA6-816F-3879F97B5CBC}" type="slidenum">
               <a:rPr b="0" lang="en-US"/>
               <a:t>6</a:t>
@@ -6902,7 +6902,7 @@
           <a:bodyPr wrap="square" lIns="0" tIns="0" rIns="0" bIns="0" rtlCol="0" anchor="ctr"/>
           <a:lstStyle/>
           <a:p>
-            <a:pPr algn="l" indent="0" marL="0">
+            <a:pPr eaLnBrk="0" algn="l" indent="0" marL="0">
               <a:buNone/>
             </a:pPr>
             <a:r>
@@ -6968,7 +6968,7 @@
           <a:bodyPr wrap="square" lIns="0" tIns="0" rIns="0" bIns="0" rtlCol="0" anchor="ctr"/>
           <a:lstStyle/>
           <a:p>
-            <a:pPr indent="0" marL="0">
+            <a:pPr eaLnBrk="0" indent="0" marL="0">
               <a:spcAft>
                 <a:spcPts val="600"/>
               </a:spcAft>
@@ -7037,7 +7037,7 @@
           <a:bodyPr wrap="square" lIns="0" tIns="0" rIns="0" bIns="0" rtlCol="0" anchor="ctr"/>
           <a:lstStyle/>
           <a:p>
-            <a:pPr indent="0" marL="0">
+            <a:pPr eaLnBrk="0" indent="0" marL="0">
               <a:spcAft>
                 <a:spcPts val="600"/>
               </a:spcAft>
@@ -7087,7 +7087,7 @@
           <a:bodyPr wrap="square" lIns="177800" tIns="0" rIns="177800" bIns="0" rtlCol="0" anchor="ctr"/>
           <a:lstStyle/>
           <a:p>
-            <a:pPr algn="l" indent="0" marL="0">
+            <a:pPr eaLnBrk="0" algn="l" indent="0" marL="0">
               <a:buNone/>
             </a:pPr>
             <a:r>
@@ -7126,7 +7126,7 @@
           <a:bodyPr wrap="square" lIns="0" tIns="0" rIns="0" bIns="0" rtlCol="0" anchor="t"/>
           <a:lstStyle/>
           <a:p>
-            <a:pPr algn="l" indent="0" marL="0">
+            <a:pPr eaLnBrk="0" algn="l" indent="0" marL="0">
               <a:buNone/>
             </a:pPr>
             <a:r>
@@ -7173,7 +7173,7 @@
           <a:bodyPr wrap="square" lIns="177800" tIns="0" rIns="177800" bIns="0" rtlCol="0" anchor="ctr"/>
           <a:lstStyle/>
           <a:p>
-            <a:pPr algn="l" indent="0" marL="0">
+            <a:pPr eaLnBrk="0" algn="l" indent="0" marL="0">
               <a:buNone/>
             </a:pPr>
             <a:r>
@@ -7212,7 +7212,7 @@
           <a:bodyPr wrap="square" lIns="0" tIns="0" rIns="0" bIns="0" rtlCol="0" anchor="t"/>
           <a:lstStyle/>
           <a:p>
-            <a:pPr algn="l" indent="0" marL="0">
+            <a:pPr eaLnBrk="0" algn="l" indent="0" marL="0">
               <a:buNone/>
             </a:pPr>
             <a:r>
@@ -7229,7 +7229,7 @@
             <a:endParaRPr lang="ko-KR" sz="3000" dirty="0"/>
           </a:p>
           <a:p>
-            <a:pPr algn="l" indent="0" marL="0">
+            <a:pPr eaLnBrk="0" algn="l" indent="0" marL="0">
               <a:buNone/>
             </a:pPr>
             <a:r>
@@ -7246,7 +7246,7 @@
             <a:endParaRPr lang="ko-KR" sz="3000" dirty="0"/>
           </a:p>
           <a:p>
-            <a:pPr algn="l" indent="0" marL="0">
+            <a:pPr eaLnBrk="0" algn="l" indent="0" marL="0">
               <a:buNone/>
             </a:pPr>
             <a:r>
@@ -7303,7 +7303,7 @@
             </a:lvl1pPr>
           </a:lstStyle>
           <a:p>
-            <a:pPr algn="r"/>
+            <a:pPr eaLnBrk="0" algn="r"/>
             <a:fld id="{F7021451-1387-4CA6-816F-3879F97B5CBC}" type="slidenum">
               <a:rPr b="0" lang="en-US"/>
               <a:t>7</a:t>
@@ -7360,7 +7360,7 @@
           <a:bodyPr wrap="square" lIns="0" tIns="0" rIns="0" bIns="0" rtlCol="0" anchor="ctr"/>
           <a:lstStyle/>
           <a:p>
-            <a:pPr algn="l" indent="0" marL="0">
+            <a:pPr eaLnBrk="0" algn="l" indent="0" marL="0">
               <a:buNone/>
             </a:pPr>
             <a:r>
@@ -7399,7 +7399,7 @@
           <a:bodyPr wrap="square" lIns="0" tIns="0" rIns="0" bIns="0" rtlCol="0" anchor="ctr"/>
           <a:lstStyle/>
           <a:p>
-            <a:pPr algn="l" indent="0" marL="0">
+            <a:pPr eaLnBrk="0" algn="l" indent="0" marL="0">
               <a:buNone/>
             </a:pPr>
             <a:r>
@@ -7465,7 +7465,7 @@
           <a:bodyPr wrap="square" lIns="0" tIns="0" rIns="0" bIns="0" rtlCol="0" anchor="ctr"/>
           <a:lstStyle/>
           <a:p>
-            <a:pPr indent="0" marL="0">
+            <a:pPr eaLnBrk="0" indent="0" marL="0">
               <a:spcAft>
                 <a:spcPts val="600"/>
               </a:spcAft>
@@ -7515,7 +7515,7 @@
           <a:bodyPr wrap="square" lIns="0" tIns="0" rIns="0" bIns="0" rtlCol="0" anchor="ctr"/>
           <a:lstStyle/>
           <a:p>
-            <a:pPr algn="ctr" indent="0" marL="0">
+            <a:pPr eaLnBrk="0" algn="ctr" indent="0" marL="0">
               <a:buNone/>
             </a:pPr>
             <a:r>
@@ -7554,7 +7554,7 @@
           <a:bodyPr wrap="square" lIns="0" tIns="0" rIns="0" bIns="0" rtlCol="0" anchor="ctr"/>
           <a:lstStyle/>
           <a:p>
-            <a:pPr algn="l" indent="0" marL="0">
+            <a:pPr eaLnBrk="0" algn="l" indent="0" marL="0">
               <a:buNone/>
             </a:pPr>
             <a:r>
@@ -7601,7 +7601,7 @@
           <a:bodyPr wrap="square" lIns="0" tIns="0" rIns="0" bIns="0" rtlCol="0" anchor="ctr"/>
           <a:lstStyle/>
           <a:p>
-            <a:pPr algn="ctr" indent="0" marL="0">
+            <a:pPr eaLnBrk="0" algn="ctr" indent="0" marL="0">
               <a:buNone/>
             </a:pPr>
             <a:r>
@@ -7640,7 +7640,7 @@
           <a:bodyPr wrap="square" lIns="0" tIns="0" rIns="0" bIns="0" rtlCol="0" anchor="ctr"/>
           <a:lstStyle/>
           <a:p>
-            <a:pPr algn="l" indent="0" marL="0">
+            <a:pPr eaLnBrk="0" algn="l" indent="0" marL="0">
               <a:buNone/>
             </a:pPr>
             <a:r>
@@ -7697,7 +7697,7 @@
             </a:lvl1pPr>
           </a:lstStyle>
           <a:p>
-            <a:pPr algn="r"/>
+            <a:pPr eaLnBrk="0" algn="r"/>
             <a:fld id="{F7021451-1387-4CA6-816F-3879F97B5CBC}" type="slidenum">
               <a:rPr b="0" lang="en-US"/>
               <a:t>8</a:t>
@@ -7754,7 +7754,7 @@
           <a:bodyPr wrap="square" lIns="0" tIns="0" rIns="0" bIns="0" rtlCol="0" anchor="ctr"/>
           <a:lstStyle/>
           <a:p>
-            <a:pPr algn="l" indent="0" marL="0">
+            <a:pPr eaLnBrk="0" algn="l" indent="0" marL="0">
               <a:buNone/>
             </a:pPr>
             <a:r>
@@ -7793,7 +7793,7 @@
           <a:bodyPr wrap="square" lIns="0" tIns="0" rIns="0" bIns="0" rtlCol="0" anchor="ctr"/>
           <a:lstStyle/>
           <a:p>
-            <a:pPr algn="l" indent="0" marL="0">
+            <a:pPr eaLnBrk="0" algn="l" indent="0" marL="0">
               <a:buNone/>
             </a:pPr>
             <a:r>
@@ -7859,7 +7859,7 @@
           <a:bodyPr wrap="square" lIns="0" tIns="0" rIns="0" bIns="0" rtlCol="0" anchor="ctr"/>
           <a:lstStyle/>
           <a:p>
-            <a:pPr indent="0" marL="0">
+            <a:pPr eaLnBrk="0" indent="0" marL="0">
               <a:spcAft>
                 <a:spcPts val="600"/>
               </a:spcAft>
@@ -7879,7 +7879,7 @@
             <a:endParaRPr lang="ko-KR" sz="3000" dirty="0"/>
           </a:p>
           <a:p>
-            <a:pPr indent="0" marL="0">
+            <a:pPr eaLnBrk="0" indent="0" marL="0">
               <a:spcAft>
                 <a:spcPts val="600"/>
               </a:spcAft>
@@ -7899,7 +7899,7 @@
             <a:endParaRPr lang="ko-KR" sz="3000" dirty="0"/>
           </a:p>
           <a:p>
-            <a:pPr indent="0" marL="0">
+            <a:pPr eaLnBrk="0" indent="0" marL="0">
               <a:spcAft>
                 <a:spcPts val="600"/>
               </a:spcAft>
@@ -7919,7 +7919,7 @@
             <a:endParaRPr lang="ko-KR" sz="3000" dirty="0"/>
           </a:p>
           <a:p>
-            <a:pPr indent="0" marL="0">
+            <a:pPr eaLnBrk="0" indent="0" marL="0">
               <a:spcAft>
                 <a:spcPts val="600"/>
               </a:spcAft>
@@ -7939,7 +7939,7 @@
             <a:endParaRPr lang="ko-KR" sz="3000" dirty="0"/>
           </a:p>
           <a:p>
-            <a:pPr indent="0" marL="0">
+            <a:pPr eaLnBrk="0" indent="0" marL="0">
               <a:spcAft>
                 <a:spcPts val="600"/>
               </a:spcAft>
@@ -7987,7 +7987,7 @@
           <a:bodyPr wrap="square" lIns="0" tIns="0" rIns="0" bIns="0" rtlCol="0" anchor="ctr"/>
           <a:lstStyle/>
           <a:p>
-            <a:pPr algn="ctr" indent="0" marL="0">
+            <a:pPr eaLnBrk="0" algn="ctr" indent="0" marL="0">
               <a:buNone/>
             </a:pPr>
             <a:r>
@@ -8026,7 +8026,7 @@
           <a:bodyPr wrap="square" lIns="0" tIns="0" rIns="0" bIns="0" rtlCol="0" anchor="t"/>
           <a:lstStyle/>
           <a:p>
-            <a:pPr algn="l" indent="0" marL="0">
+            <a:pPr eaLnBrk="0" algn="l" indent="0" marL="0">
               <a:buNone/>
             </a:pPr>
             <a:r>
@@ -8071,7 +8071,7 @@
           <a:bodyPr wrap="square" lIns="0" tIns="0" rIns="0" bIns="0" rtlCol="0" anchor="ctr"/>
           <a:lstStyle/>
           <a:p>
-            <a:pPr algn="ctr" indent="0" marL="0">
+            <a:pPr eaLnBrk="0" algn="ctr" indent="0" marL="0">
               <a:buNone/>
             </a:pPr>
             <a:r>
@@ -8110,7 +8110,7 @@
           <a:bodyPr wrap="square" lIns="0" tIns="0" rIns="0" bIns="0" rtlCol="0" anchor="t"/>
           <a:lstStyle/>
           <a:p>
-            <a:pPr algn="l" indent="0" marL="0">
+            <a:pPr eaLnBrk="0" algn="l" indent="0" marL="0">
               <a:buNone/>
             </a:pPr>
             <a:r>
@@ -8155,7 +8155,7 @@
           <a:bodyPr wrap="square" lIns="0" tIns="0" rIns="0" bIns="0" rtlCol="0" anchor="ctr"/>
           <a:lstStyle/>
           <a:p>
-            <a:pPr algn="ctr" indent="0" marL="0">
+            <a:pPr eaLnBrk="0" algn="ctr" indent="0" marL="0">
               <a:buNone/>
             </a:pPr>
             <a:r>
@@ -8194,7 +8194,7 @@
           <a:bodyPr wrap="square" lIns="0" tIns="0" rIns="0" bIns="0" rtlCol="0" anchor="t"/>
           <a:lstStyle/>
           <a:p>
-            <a:pPr algn="l" indent="0" marL="0">
+            <a:pPr eaLnBrk="0" algn="l" indent="0" marL="0">
               <a:buNone/>
             </a:pPr>
             <a:r>
@@ -8239,7 +8239,7 @@
           <a:bodyPr wrap="square" lIns="0" tIns="0" rIns="0" bIns="0" rtlCol="0" anchor="ctr"/>
           <a:lstStyle/>
           <a:p>
-            <a:pPr algn="ctr" indent="0" marL="0">
+            <a:pPr eaLnBrk="0" algn="ctr" indent="0" marL="0">
               <a:buNone/>
             </a:pPr>
             <a:r>
@@ -8278,7 +8278,7 @@
           <a:bodyPr wrap="square" lIns="0" tIns="0" rIns="0" bIns="0" rtlCol="0" anchor="t"/>
           <a:lstStyle/>
           <a:p>
-            <a:pPr algn="l" indent="0" marL="0">
+            <a:pPr eaLnBrk="0" algn="l" indent="0" marL="0">
               <a:buNone/>
             </a:pPr>
             <a:r>
@@ -8335,7 +8335,7 @@
             </a:lvl1pPr>
           </a:lstStyle>
           <a:p>
-            <a:pPr algn="r"/>
+            <a:pPr eaLnBrk="0" algn="r"/>
             <a:fld id="{F7021451-1387-4CA6-816F-3879F97B5CBC}" type="slidenum">
               <a:rPr b="0" lang="en-US"/>
               <a:t>9</a:t>

--- a/dist/초3/국어/발표와쓰기/초3_국어_발표와쓰기_02_문단쓰기.pptx
+++ b/dist/초3/국어/발표와쓰기/초3_국어_발표와쓰기_02_문단쓰기.pptx
@@ -119,39 +119,39 @@
   <p:extLst>
     <p:ext uri="{521415D9-36F7-43E2-AB2F-B90AF26B5E84}">
       <p14:sectionLst xmlns:p14="http://schemas.microsoft.com/office/powerpoint/2010/main">
-        <p14:section name="도입" id="{b70e8836-0e95-d118-7fb0-4db1557e9b1a}">
+        <p14:section name="도입" id="{b0d7dc5c-c622-c44e-639f-5a250964cb1c}">
           <p14:sldIdLst>
             <p14:sldId id="256"/>
             <p14:sldId id="257"/>
           </p14:sldIdLst>
         </p14:section>
-        <p14:section name="개념" id="{1e7e7ab2-a747-b28d-b855-a105b1ad2226}">
+        <p14:section name="개념" id="{daac7db5-3cd1-1735-d07f-b92aed2dbb75}">
           <p14:sldIdLst>
             <p14:sldId id="258"/>
             <p14:sldId id="259"/>
             <p14:sldId id="260"/>
           </p14:sldIdLst>
         </p14:section>
-        <p14:section name="연습" id="{24209a81-0c00-6143-8f71-289a41b00128}">
+        <p14:section name="연습" id="{ab3005dd-2d28-a153-fbf5-d443650953ec}">
           <p14:sldIdLst>
             <p14:sldId id="261"/>
             <p14:sldId id="262"/>
             <p14:sldId id="263"/>
           </p14:sldIdLst>
         </p14:section>
-        <p14:section name="확인" id="{4be310ef-6a3a-b506-4b37-c611d83b299c}">
+        <p14:section name="확인" id="{52984aed-b9bf-8912-8362-e913118624b2}">
           <p14:sldIdLst>
             <p14:sldId id="264"/>
             <p14:sldId id="265"/>
             <p14:sldId id="266"/>
           </p14:sldIdLst>
         </p14:section>
-        <p14:section name="정리" id="{ee9f46ae-3dba-1f46-0df0-012eb6fbce89}">
+        <p14:section name="정리" id="{ff553285-63d0-664b-5f9e-25178229ef15}">
           <p14:sldIdLst>
             <p14:sldId id="267"/>
           </p14:sldIdLst>
         </p14:section>
-        <p14:section name="보충" id="{3fc989f6-b30f-1f71-1471-3f3f2cf658eb}">
+        <p14:section name="보충" id="{edbd0a14-0505-dbf4-6469-76c853d1d77f}">
           <p14:sldIdLst>
             <p14:sldId id="268"/>
           </p14:sldIdLst>
